--- a/material/[SeSAC_YDP_6] 32_2_TypeScript.pptx
+++ b/material/[SeSAC_YDP_6] 32_2_TypeScript.pptx
@@ -212,7 +212,7 @@
           <a:p>
             <a:fld id="{86F0F02C-F923-483B-B7AF-E4D1E093BA0E}" type="datetimeFigureOut">
               <a:rPr lang="ko-KR" altLang="en-US" smtClean="0"/>
-              <a:t>2024-08-19</a:t>
+              <a:t>2024-08-20</a:t>
             </a:fld>
             <a:endParaRPr lang="ko-KR" altLang="en-US"/>
           </a:p>
@@ -563,6 +563,90 @@
 </p:notes>
 </file>
 
+<file path=ppt/notesSlides/notesSlide10.xml><?xml version="1.0" encoding="utf-8"?>
+<p:notes xmlns:a="http://schemas.openxmlformats.org/drawingml/2006/main" xmlns:r="http://schemas.openxmlformats.org/officeDocument/2006/relationships" xmlns:p="http://schemas.openxmlformats.org/presentationml/2006/main">
+  <p:cSld>
+    <p:spTree>
+      <p:nvGrpSpPr>
+        <p:cNvPr id="1" name=""/>
+        <p:cNvGrpSpPr/>
+        <p:nvPr/>
+      </p:nvGrpSpPr>
+      <p:grpSpPr>
+        <a:xfrm>
+          <a:off x="0" y="0"/>
+          <a:ext cx="0" cy="0"/>
+          <a:chOff x="0" y="0"/>
+          <a:chExt cx="0" cy="0"/>
+        </a:xfrm>
+      </p:grpSpPr>
+      <p:sp>
+        <p:nvSpPr>
+          <p:cNvPr id="2" name="슬라이드 이미지 개체 틀 1"/>
+          <p:cNvSpPr>
+            <a:spLocks noGrp="1" noRot="1" noChangeAspect="1"/>
+          </p:cNvSpPr>
+          <p:nvPr>
+            <p:ph type="sldImg"/>
+          </p:nvPr>
+        </p:nvSpPr>
+        <p:spPr/>
+      </p:sp>
+      <p:sp>
+        <p:nvSpPr>
+          <p:cNvPr id="3" name="슬라이드 노트 개체 틀 2"/>
+          <p:cNvSpPr>
+            <a:spLocks noGrp="1"/>
+          </p:cNvSpPr>
+          <p:nvPr>
+            <p:ph type="body" idx="1"/>
+          </p:nvPr>
+        </p:nvSpPr>
+        <p:spPr/>
+        <p:txBody>
+          <a:bodyPr/>
+          <a:lstStyle/>
+          <a:p>
+            <a:endParaRPr lang="en-US" altLang="ko-KR" dirty="0"/>
+          </a:p>
+        </p:txBody>
+      </p:sp>
+      <p:sp>
+        <p:nvSpPr>
+          <p:cNvPr id="4" name="슬라이드 번호 개체 틀 3"/>
+          <p:cNvSpPr>
+            <a:spLocks noGrp="1"/>
+          </p:cNvSpPr>
+          <p:nvPr>
+            <p:ph type="sldNum" sz="quarter" idx="5"/>
+          </p:nvPr>
+        </p:nvSpPr>
+        <p:spPr/>
+        <p:txBody>
+          <a:bodyPr/>
+          <a:lstStyle/>
+          <a:p>
+            <a:fld id="{C09E5BFC-1559-42F1-8940-AB342D56BF02}" type="slidenum">
+              <a:rPr lang="ko-KR" altLang="en-US" smtClean="0"/>
+              <a:t>13</a:t>
+            </a:fld>
+            <a:endParaRPr lang="ko-KR" altLang="en-US"/>
+          </a:p>
+        </p:txBody>
+      </p:sp>
+    </p:spTree>
+    <p:extLst>
+      <p:ext uri="{BB962C8B-B14F-4D97-AF65-F5344CB8AC3E}">
+        <p14:creationId xmlns:p14="http://schemas.microsoft.com/office/powerpoint/2010/main" val="3775740493"/>
+      </p:ext>
+    </p:extLst>
+  </p:cSld>
+  <p:clrMapOvr>
+    <a:masterClrMapping/>
+  </p:clrMapOvr>
+</p:notes>
+</file>
+
 <file path=ppt/notesSlides/notesSlide2.xml><?xml version="1.0" encoding="utf-8"?>
 <p:notes xmlns:a="http://schemas.openxmlformats.org/drawingml/2006/main" xmlns:r="http://schemas.openxmlformats.org/officeDocument/2006/relationships" xmlns:p="http://schemas.openxmlformats.org/presentationml/2006/main">
   <p:cSld>
@@ -609,10 +693,46 @@
           <a:p>
             <a:r>
               <a:rPr lang="ko-KR" altLang="en-US" dirty="0"/>
-              <a:t>어떤 식으로 선언하는지는 다음장에</a:t>
-            </a:r>
-            <a:r>
-              <a:rPr lang="en-US" altLang="ko-KR" dirty="0"/>
+              <a:t>어떤 식으로 선언하는지는 </a:t>
+            </a:r>
+            <a:r>
+              <a:rPr lang="ko-KR" altLang="en-US" dirty="0" err="1"/>
+              <a:t>다음장에</a:t>
+            </a:r>
+            <a:r>
+              <a:rPr lang="en-US" altLang="ko-KR" dirty="0" smtClean="0"/>
+              <a:t>!</a:t>
+            </a:r>
+          </a:p>
+          <a:p>
+            <a:r>
+              <a:rPr lang="en-US" altLang="ko-KR" dirty="0" smtClean="0"/>
+              <a:t>JS</a:t>
+            </a:r>
+            <a:r>
+              <a:rPr lang="ko-KR" altLang="en-US" dirty="0" smtClean="0"/>
+              <a:t>와 매우 유사하지만</a:t>
+            </a:r>
+            <a:r>
+              <a:rPr lang="en-US" altLang="ko-KR" dirty="0" smtClean="0"/>
+              <a:t>,</a:t>
+            </a:r>
+          </a:p>
+          <a:p>
+            <a:r>
+              <a:rPr lang="en-US" altLang="ko-KR" dirty="0" smtClean="0"/>
+              <a:t>+)</a:t>
+            </a:r>
+            <a:r>
+              <a:rPr lang="en-US" altLang="ko-KR" baseline="0" dirty="0" smtClean="0"/>
+              <a:t> </a:t>
+            </a:r>
+            <a:r>
+              <a:rPr lang="ko-KR" altLang="en-US" baseline="0" dirty="0" smtClean="0"/>
+              <a:t>함수의 매개변수와 반환 값에 대한 타입을 명시할 수 있다는 특징</a:t>
+            </a:r>
+            <a:r>
+              <a:rPr lang="en-US" altLang="ko-KR" baseline="0" dirty="0" smtClean="0"/>
               <a:t>!</a:t>
             </a:r>
             <a:endParaRPr lang="ko-KR" altLang="en-US" dirty="0"/>
@@ -710,7 +830,7 @@
             <a:spLocks noGrp="1"/>
           </p:cNvSpPr>
           <p:nvPr>
-            <p:ph type="sldNum" sz="quarter" idx="5"/>
+            <p:ph type="sldNum" sz="quarter" idx="10"/>
           </p:nvPr>
         </p:nvSpPr>
         <p:spPr/>
@@ -720,7 +840,7 @@
           <a:p>
             <a:fld id="{7B288C33-55A0-4375-B4B0-E8B5C9E6A8CF}" type="slidenum">
               <a:rPr lang="ko-KR" altLang="en-US" smtClean="0"/>
-              <a:t>5</a:t>
+              <a:t>4</a:t>
             </a:fld>
             <a:endParaRPr lang="ko-KR" altLang="en-US"/>
           </a:p>
@@ -729,7 +849,7 @@
     </p:spTree>
     <p:extLst>
       <p:ext uri="{BB962C8B-B14F-4D97-AF65-F5344CB8AC3E}">
-        <p14:creationId xmlns:p14="http://schemas.microsoft.com/office/powerpoint/2010/main" val="2917919996"/>
+        <p14:creationId xmlns:p14="http://schemas.microsoft.com/office/powerpoint/2010/main" val="3252718799"/>
       </p:ext>
     </p:extLst>
   </p:cSld>
@@ -804,7 +924,7 @@
           <a:p>
             <a:fld id="{7B288C33-55A0-4375-B4B0-E8B5C9E6A8CF}" type="slidenum">
               <a:rPr lang="ko-KR" altLang="en-US" smtClean="0"/>
-              <a:t>6</a:t>
+              <a:t>5</a:t>
             </a:fld>
             <a:endParaRPr lang="ko-KR" altLang="en-US"/>
           </a:p>
@@ -813,7 +933,7 @@
     </p:spTree>
     <p:extLst>
       <p:ext uri="{BB962C8B-B14F-4D97-AF65-F5344CB8AC3E}">
-        <p14:creationId xmlns:p14="http://schemas.microsoft.com/office/powerpoint/2010/main" val="3616901822"/>
+        <p14:creationId xmlns:p14="http://schemas.microsoft.com/office/powerpoint/2010/main" val="2917919996"/>
       </p:ext>
     </p:extLst>
   </p:cSld>
@@ -867,7 +987,7 @@
           <a:bodyPr/>
           <a:lstStyle/>
           <a:p>
-            <a:endParaRPr lang="en-US" altLang="ko-KR" dirty="0"/>
+            <a:endParaRPr lang="ko-KR" altLang="en-US" dirty="0"/>
           </a:p>
         </p:txBody>
       </p:sp>
@@ -886,9 +1006,9 @@
           <a:bodyPr/>
           <a:lstStyle/>
           <a:p>
-            <a:fld id="{C09E5BFC-1559-42F1-8940-AB342D56BF02}" type="slidenum">
+            <a:fld id="{7B288C33-55A0-4375-B4B0-E8B5C9E6A8CF}" type="slidenum">
               <a:rPr lang="ko-KR" altLang="en-US" smtClean="0"/>
-              <a:t>9</a:t>
+              <a:t>6</a:t>
             </a:fld>
             <a:endParaRPr lang="ko-KR" altLang="en-US"/>
           </a:p>
@@ -897,7 +1017,7 @@
     </p:spTree>
     <p:extLst>
       <p:ext uri="{BB962C8B-B14F-4D97-AF65-F5344CB8AC3E}">
-        <p14:creationId xmlns:p14="http://schemas.microsoft.com/office/powerpoint/2010/main" val="2415502920"/>
+        <p14:creationId xmlns:p14="http://schemas.microsoft.com/office/powerpoint/2010/main" val="3616901822"/>
       </p:ext>
     </p:extLst>
   </p:cSld>
@@ -962,7 +1082,7 @@
             <a:spLocks noGrp="1"/>
           </p:cNvSpPr>
           <p:nvPr>
-            <p:ph type="sldNum" sz="quarter" idx="5"/>
+            <p:ph type="sldNum" sz="quarter" idx="10"/>
           </p:nvPr>
         </p:nvSpPr>
         <p:spPr/>
@@ -972,7 +1092,7 @@
           <a:p>
             <a:fld id="{7B288C33-55A0-4375-B4B0-E8B5C9E6A8CF}" type="slidenum">
               <a:rPr lang="ko-KR" altLang="en-US" smtClean="0"/>
-              <a:t>11</a:t>
+              <a:t>8</a:t>
             </a:fld>
             <a:endParaRPr lang="ko-KR" altLang="en-US"/>
           </a:p>
@@ -981,7 +1101,7 @@
     </p:spTree>
     <p:extLst>
       <p:ext uri="{BB962C8B-B14F-4D97-AF65-F5344CB8AC3E}">
-        <p14:creationId xmlns:p14="http://schemas.microsoft.com/office/powerpoint/2010/main" val="2354929787"/>
+        <p14:creationId xmlns:p14="http://schemas.microsoft.com/office/powerpoint/2010/main" val="582130644"/>
       </p:ext>
     </p:extLst>
   </p:cSld>
@@ -1035,7 +1155,7 @@
           <a:bodyPr/>
           <a:lstStyle/>
           <a:p>
-            <a:endParaRPr lang="ko-KR" altLang="en-US" dirty="0"/>
+            <a:endParaRPr lang="en-US" altLang="ko-KR" dirty="0"/>
           </a:p>
         </p:txBody>
       </p:sp>
@@ -1054,9 +1174,9 @@
           <a:bodyPr/>
           <a:lstStyle/>
           <a:p>
-            <a:fld id="{7B288C33-55A0-4375-B4B0-E8B5C9E6A8CF}" type="slidenum">
+            <a:fld id="{C09E5BFC-1559-42F1-8940-AB342D56BF02}" type="slidenum">
               <a:rPr lang="ko-KR" altLang="en-US" smtClean="0"/>
-              <a:t>12</a:t>
+              <a:t>9</a:t>
             </a:fld>
             <a:endParaRPr lang="ko-KR" altLang="en-US"/>
           </a:p>
@@ -1065,7 +1185,7 @@
     </p:spTree>
     <p:extLst>
       <p:ext uri="{BB962C8B-B14F-4D97-AF65-F5344CB8AC3E}">
-        <p14:creationId xmlns:p14="http://schemas.microsoft.com/office/powerpoint/2010/main" val="184157877"/>
+        <p14:creationId xmlns:p14="http://schemas.microsoft.com/office/powerpoint/2010/main" val="2415502920"/>
       </p:ext>
     </p:extLst>
   </p:cSld>
@@ -1119,7 +1239,77 @@
           <a:bodyPr/>
           <a:lstStyle/>
           <a:p>
-            <a:endParaRPr lang="en-US" altLang="ko-KR" dirty="0"/>
+            <a:r>
+              <a:rPr lang="en-US" altLang="ko-KR" dirty="0" smtClean="0"/>
+              <a:t>TS </a:t>
+            </a:r>
+            <a:r>
+              <a:rPr lang="ko-KR" altLang="en-US" dirty="0" smtClean="0"/>
+              <a:t>타입을 </a:t>
+            </a:r>
+            <a:r>
+              <a:rPr lang="ko-KR" altLang="en-US" dirty="0" err="1" smtClean="0"/>
+              <a:t>매개변수화</a:t>
+            </a:r>
+            <a:r>
+              <a:rPr lang="ko-KR" altLang="en-US" dirty="0" smtClean="0"/>
+              <a:t> 할 수 있는 기능</a:t>
+            </a:r>
+            <a:r>
+              <a:rPr lang="en-US" altLang="ko-KR" dirty="0" smtClean="0"/>
+              <a:t>.</a:t>
+            </a:r>
+          </a:p>
+          <a:p>
+            <a:r>
+              <a:rPr lang="ko-KR" altLang="en-US" dirty="0" smtClean="0"/>
+              <a:t>구체적으로 정의하지 않고도 다양한</a:t>
+            </a:r>
+            <a:r>
+              <a:rPr lang="ko-KR" altLang="en-US" baseline="0" dirty="0" smtClean="0"/>
+              <a:t> 타입에 대해 유연하게 사용할 수 있도록 해줌</a:t>
+            </a:r>
+            <a:r>
+              <a:rPr lang="en-US" altLang="ko-KR" baseline="0" dirty="0" smtClean="0"/>
+              <a:t>.</a:t>
+            </a:r>
+          </a:p>
+          <a:p>
+            <a:endParaRPr lang="en-US" altLang="ko-KR" baseline="0" dirty="0" smtClean="0"/>
+          </a:p>
+          <a:p>
+            <a:pPr marL="171450" indent="-171450">
+              <a:buFont typeface="Wingdings" panose="05000000000000000000" pitchFamily="2" charset="2"/>
+              <a:buChar char="à"/>
+            </a:pPr>
+            <a:r>
+              <a:rPr lang="ko-KR" altLang="en-US" baseline="0" dirty="0" smtClean="0">
+                <a:sym typeface="Wingdings" panose="05000000000000000000" pitchFamily="2" charset="2"/>
+              </a:rPr>
+              <a:t>타입 매개변수를 사용하여 특정 타입을 일반화하여 정의할 수 있게 함</a:t>
+            </a:r>
+            <a:r>
+              <a:rPr lang="en-US" altLang="ko-KR" baseline="0" dirty="0" smtClean="0">
+                <a:sym typeface="Wingdings" panose="05000000000000000000" pitchFamily="2" charset="2"/>
+              </a:rPr>
+              <a:t>.</a:t>
+            </a:r>
+          </a:p>
+          <a:p>
+            <a:pPr marL="171450" indent="-171450">
+              <a:buFont typeface="Wingdings" panose="05000000000000000000" pitchFamily="2" charset="2"/>
+              <a:buChar char="à"/>
+            </a:pPr>
+            <a:endParaRPr lang="en-US" altLang="ko-KR" baseline="0" dirty="0" smtClean="0">
+              <a:sym typeface="Wingdings" panose="05000000000000000000" pitchFamily="2" charset="2"/>
+            </a:endParaRPr>
+          </a:p>
+          <a:p>
+            <a:pPr marL="0" indent="0">
+              <a:buFont typeface="Wingdings" panose="05000000000000000000" pitchFamily="2" charset="2"/>
+              <a:buNone/>
+            </a:pPr>
+            <a:endParaRPr lang="ko-KR" altLang="en-US" dirty="0"/>
           </a:p>
         </p:txBody>
       </p:sp>
@@ -1138,9 +1328,9 @@
           <a:bodyPr/>
           <a:lstStyle/>
           <a:p>
-            <a:fld id="{C09E5BFC-1559-42F1-8940-AB342D56BF02}" type="slidenum">
+            <a:fld id="{7B288C33-55A0-4375-B4B0-E8B5C9E6A8CF}" type="slidenum">
               <a:rPr lang="ko-KR" altLang="en-US" smtClean="0"/>
-              <a:t>13</a:t>
+              <a:t>11</a:t>
             </a:fld>
             <a:endParaRPr lang="ko-KR" altLang="en-US"/>
           </a:p>
@@ -1149,7 +1339,143 @@
     </p:spTree>
     <p:extLst>
       <p:ext uri="{BB962C8B-B14F-4D97-AF65-F5344CB8AC3E}">
-        <p14:creationId xmlns:p14="http://schemas.microsoft.com/office/powerpoint/2010/main" val="3775740493"/>
+        <p14:creationId xmlns:p14="http://schemas.microsoft.com/office/powerpoint/2010/main" val="2354929787"/>
+      </p:ext>
+    </p:extLst>
+  </p:cSld>
+  <p:clrMapOvr>
+    <a:masterClrMapping/>
+  </p:clrMapOvr>
+</p:notes>
+</file>
+
+<file path=ppt/notesSlides/notesSlide9.xml><?xml version="1.0" encoding="utf-8"?>
+<p:notes xmlns:a="http://schemas.openxmlformats.org/drawingml/2006/main" xmlns:r="http://schemas.openxmlformats.org/officeDocument/2006/relationships" xmlns:p="http://schemas.openxmlformats.org/presentationml/2006/main">
+  <p:cSld>
+    <p:spTree>
+      <p:nvGrpSpPr>
+        <p:cNvPr id="1" name=""/>
+        <p:cNvGrpSpPr/>
+        <p:nvPr/>
+      </p:nvGrpSpPr>
+      <p:grpSpPr>
+        <a:xfrm>
+          <a:off x="0" y="0"/>
+          <a:ext cx="0" cy="0"/>
+          <a:chOff x="0" y="0"/>
+          <a:chExt cx="0" cy="0"/>
+        </a:xfrm>
+      </p:grpSpPr>
+      <p:sp>
+        <p:nvSpPr>
+          <p:cNvPr id="2" name="슬라이드 이미지 개체 틀 1"/>
+          <p:cNvSpPr>
+            <a:spLocks noGrp="1" noRot="1" noChangeAspect="1"/>
+          </p:cNvSpPr>
+          <p:nvPr>
+            <p:ph type="sldImg"/>
+          </p:nvPr>
+        </p:nvSpPr>
+        <p:spPr/>
+      </p:sp>
+      <p:sp>
+        <p:nvSpPr>
+          <p:cNvPr id="3" name="슬라이드 노트 개체 틀 2"/>
+          <p:cNvSpPr>
+            <a:spLocks noGrp="1"/>
+          </p:cNvSpPr>
+          <p:nvPr>
+            <p:ph type="body" idx="1"/>
+          </p:nvPr>
+        </p:nvSpPr>
+        <p:spPr/>
+        <p:txBody>
+          <a:bodyPr/>
+          <a:lstStyle/>
+          <a:p>
+            <a:r>
+              <a:rPr lang="en-US" altLang="ko-KR" dirty="0" smtClean="0"/>
+              <a:t>&lt;T&gt; : T</a:t>
+            </a:r>
+            <a:r>
+              <a:rPr lang="ko-KR" altLang="en-US" dirty="0" smtClean="0"/>
+              <a:t>는 타입 매개변수</a:t>
+            </a:r>
+            <a:r>
+              <a:rPr lang="en-US" altLang="ko-KR" dirty="0" smtClean="0"/>
+              <a:t>. </a:t>
+            </a:r>
+            <a:r>
+              <a:rPr lang="ko-KR" altLang="en-US" dirty="0" smtClean="0"/>
+              <a:t>이 함수는 어떤 타입 </a:t>
+            </a:r>
+            <a:r>
+              <a:rPr lang="en-US" altLang="ko-KR" dirty="0" smtClean="0"/>
+              <a:t>‘T’</a:t>
+            </a:r>
+            <a:r>
+              <a:rPr lang="ko-KR" altLang="en-US" dirty="0" smtClean="0"/>
+              <a:t>를</a:t>
+            </a:r>
+            <a:r>
+              <a:rPr lang="en-US" altLang="ko-KR" dirty="0" smtClean="0"/>
+              <a:t> </a:t>
+            </a:r>
+            <a:r>
+              <a:rPr lang="ko-KR" altLang="en-US" dirty="0" smtClean="0"/>
+              <a:t>받아들이며</a:t>
+            </a:r>
+            <a:r>
+              <a:rPr lang="en-US" altLang="ko-KR" dirty="0" smtClean="0"/>
+              <a:t>, </a:t>
+            </a:r>
+            <a:r>
+              <a:rPr lang="ko-KR" altLang="en-US" dirty="0" smtClean="0"/>
+              <a:t>그 타입 </a:t>
+            </a:r>
+            <a:r>
+              <a:rPr lang="en-US" altLang="ko-KR" dirty="0" smtClean="0"/>
+              <a:t>‘T’</a:t>
+            </a:r>
+            <a:r>
+              <a:rPr lang="ko-KR" altLang="en-US" dirty="0" smtClean="0"/>
+              <a:t>를 반환함</a:t>
+            </a:r>
+            <a:r>
+              <a:rPr lang="en-US" altLang="ko-KR" dirty="0" smtClean="0"/>
+              <a:t>.</a:t>
+            </a:r>
+            <a:endParaRPr lang="ko-KR" altLang="en-US" dirty="0"/>
+          </a:p>
+        </p:txBody>
+      </p:sp>
+      <p:sp>
+        <p:nvSpPr>
+          <p:cNvPr id="4" name="슬라이드 번호 개체 틀 3"/>
+          <p:cNvSpPr>
+            <a:spLocks noGrp="1"/>
+          </p:cNvSpPr>
+          <p:nvPr>
+            <p:ph type="sldNum" sz="quarter" idx="5"/>
+          </p:nvPr>
+        </p:nvSpPr>
+        <p:spPr/>
+        <p:txBody>
+          <a:bodyPr/>
+          <a:lstStyle/>
+          <a:p>
+            <a:fld id="{7B288C33-55A0-4375-B4B0-E8B5C9E6A8CF}" type="slidenum">
+              <a:rPr lang="ko-KR" altLang="en-US" smtClean="0"/>
+              <a:t>12</a:t>
+            </a:fld>
+            <a:endParaRPr lang="ko-KR" altLang="en-US"/>
+          </a:p>
+        </p:txBody>
+      </p:sp>
+    </p:spTree>
+    <p:extLst>
+      <p:ext uri="{BB962C8B-B14F-4D97-AF65-F5344CB8AC3E}">
+        <p14:creationId xmlns:p14="http://schemas.microsoft.com/office/powerpoint/2010/main" val="184157877"/>
       </p:ext>
     </p:extLst>
   </p:cSld>
@@ -5080,7 +5406,7 @@
         <p:spPr>
           <a:xfrm>
             <a:off x="838200" y="1565214"/>
-            <a:ext cx="10515600" cy="5067080"/>
+            <a:ext cx="11353800" cy="5067080"/>
           </a:xfrm>
         </p:spPr>
         <p:txBody>
@@ -5147,8 +5473,8 @@
           </a:p>
           <a:p>
             <a:r>
-              <a:rPr lang="ko-KR" altLang="en-US" sz="2400" dirty="0" err="1"/>
-              <a:t>예를들면</a:t>
+              <a:rPr lang="ko-KR" altLang="en-US" sz="2400" dirty="0" smtClean="0"/>
+              <a:t>예를 들면</a:t>
             </a:r>
             <a:r>
               <a:rPr lang="en-US" altLang="ko-KR" sz="2400" dirty="0"/>
@@ -6518,7 +6844,7 @@
           <a:p>
             <a:fld id="{0F78D9C4-20C1-4B15-A116-16DC77AD9A1E}" type="datetime1">
               <a:rPr lang="ko-KR" altLang="en-US" smtClean="0"/>
-              <a:t>2024-08-19</a:t>
+              <a:t>2024-08-20</a:t>
             </a:fld>
             <a:endParaRPr lang="ko-KR" altLang="en-US"/>
           </a:p>
@@ -6865,6 +7191,15 @@
                 <a:latin typeface="+mn-ea"/>
               </a:rPr>
               <a:t>강의 클릭</a:t>
+            </a:r>
+            <a:r>
+              <a:rPr lang="en-US" altLang="ko-KR" dirty="0">
+                <a:solidFill>
+                  <a:srgbClr val="212529"/>
+                </a:solidFill>
+                <a:latin typeface="+mn-ea"/>
+              </a:rPr>
+              <a:t/>
             </a:r>
             <a:br>
               <a:rPr lang="en-US" altLang="ko-KR" dirty="0">
@@ -7273,6 +7608,10 @@
               <a:rPr lang="ko-KR" altLang="en-US" dirty="0"/>
               <a:t>에 따라 함수 전체 타입 설정 </a:t>
             </a:r>
+            <a:r>
+              <a:rPr lang="en-US" altLang="ko-KR" dirty="0"/>
+              <a:t/>
+            </a:r>
             <a:br>
               <a:rPr lang="en-US" altLang="ko-KR" dirty="0"/>
             </a:br>
@@ -7404,8 +7743,8 @@
         </p:nvSpPr>
         <p:spPr>
           <a:xfrm>
-            <a:off x="5316278" y="1825625"/>
-            <a:ext cx="6037521" cy="4351338"/>
+            <a:off x="5299025" y="1826075"/>
+            <a:ext cx="5521375" cy="4351338"/>
           </a:xfrm>
         </p:spPr>
         <p:txBody>
@@ -7418,43 +7757,63 @@
               <a:buNone/>
             </a:pPr>
             <a:r>
-              <a:rPr lang="ko-KR" altLang="en-US" sz="2400" dirty="0"/>
+              <a:rPr lang="ko-KR" altLang="en-US" sz="2400" dirty="0">
+                <a:latin typeface="+mj-lt"/>
+              </a:rPr>
               <a:t>왼쪽의 </a:t>
             </a:r>
             <a:r>
-              <a:rPr lang="en-US" altLang="ko-KR" sz="2400" dirty="0"/>
+              <a:rPr lang="en-US" altLang="ko-KR" sz="2400" dirty="0">
+                <a:latin typeface="+mj-lt"/>
+              </a:rPr>
               <a:t>sum</a:t>
             </a:r>
             <a:r>
-              <a:rPr lang="ko-KR" altLang="en-US" sz="2400" dirty="0"/>
+              <a:rPr lang="ko-KR" altLang="en-US" sz="2400" dirty="0">
+                <a:latin typeface="+mj-lt"/>
+              </a:rPr>
               <a:t> 함수는 </a:t>
             </a:r>
             <a:r>
-              <a:rPr lang="en-US" altLang="ko-KR" sz="2400" dirty="0"/>
+              <a:rPr lang="en-US" altLang="ko-KR" sz="2400" dirty="0">
+                <a:latin typeface="+mj-lt"/>
+              </a:rPr>
               <a:t>number</a:t>
             </a:r>
             <a:r>
-              <a:rPr lang="ko-KR" altLang="en-US" sz="2400" dirty="0"/>
+              <a:rPr lang="ko-KR" altLang="en-US" sz="2400" dirty="0">
+                <a:latin typeface="+mj-lt"/>
+              </a:rPr>
               <a:t> 형 </a:t>
             </a:r>
             <a:r>
-              <a:rPr lang="en-US" altLang="ko-KR" sz="2400" dirty="0"/>
+              <a:rPr lang="en-US" altLang="ko-KR" sz="2400" dirty="0">
+                <a:latin typeface="+mj-lt"/>
+              </a:rPr>
               <a:t>a, b</a:t>
             </a:r>
             <a:r>
-              <a:rPr lang="ko-KR" altLang="en-US" sz="2400" dirty="0"/>
+              <a:rPr lang="ko-KR" altLang="en-US" sz="2400" dirty="0">
+                <a:latin typeface="+mj-lt"/>
+              </a:rPr>
               <a:t>를 매개변수로 받아 합을 </a:t>
             </a:r>
             <a:r>
-              <a:rPr lang="en-US" altLang="ko-KR" sz="2400" dirty="0"/>
+              <a:rPr lang="en-US" altLang="ko-KR" sz="2400" dirty="0">
+                <a:latin typeface="+mj-lt"/>
+              </a:rPr>
               <a:t>return </a:t>
             </a:r>
             <a:r>
-              <a:rPr lang="ko-KR" altLang="en-US" sz="2400" dirty="0"/>
+              <a:rPr lang="ko-KR" altLang="en-US" sz="2400" dirty="0">
+                <a:latin typeface="+mj-lt"/>
+              </a:rPr>
               <a:t>하는 함수입니다</a:t>
             </a:r>
             <a:r>
-              <a:rPr lang="en-US" altLang="ko-KR" sz="2400" dirty="0"/>
+              <a:rPr lang="en-US" altLang="ko-KR" sz="2400" dirty="0">
+                <a:latin typeface="+mj-lt"/>
+              </a:rPr>
               <a:t>.</a:t>
             </a:r>
           </a:p>
@@ -7462,48 +7821,76 @@
             <a:pPr marL="0" indent="0">
               <a:buNone/>
             </a:pPr>
-            <a:endParaRPr lang="en-US" altLang="ko-KR" sz="2400" dirty="0"/>
+            <a:endParaRPr lang="en-US" altLang="ko-KR" sz="2400" dirty="0" smtClean="0">
+              <a:latin typeface="+mj-lt"/>
+            </a:endParaRPr>
           </a:p>
           <a:p>
             <a:pPr marL="0" indent="0">
               <a:buNone/>
             </a:pPr>
-            <a:r>
-              <a:rPr lang="ko-KR" altLang="en-US" sz="2400" dirty="0"/>
-              <a:t>매개변수 </a:t>
-            </a:r>
-            <a:r>
-              <a:rPr lang="en-US" altLang="ko-KR" sz="2400" dirty="0"/>
-              <a:t>a, b</a:t>
-            </a:r>
-            <a:r>
-              <a:rPr lang="ko-KR" altLang="en-US" sz="2400" dirty="0"/>
-              <a:t>의 </a:t>
-            </a:r>
-            <a:r>
-              <a:rPr lang="en-US" altLang="ko-KR" sz="2400" dirty="0"/>
-              <a:t>type </a:t>
-            </a:r>
-            <a:r>
-              <a:rPr lang="ko-KR" altLang="en-US" sz="2400" dirty="0"/>
-              <a:t>설정</a:t>
-            </a:r>
-            <a:endParaRPr lang="en-US" altLang="ko-KR" sz="2400" dirty="0"/>
+            <a:endParaRPr lang="en-US" altLang="ko-KR" sz="2400" dirty="0">
+              <a:latin typeface="+mj-lt"/>
+            </a:endParaRPr>
           </a:p>
           <a:p>
             <a:pPr marL="0" indent="0">
               <a:buNone/>
             </a:pPr>
             <a:r>
-              <a:rPr lang="ko-KR" altLang="en-US" sz="2400" dirty="0"/>
+              <a:rPr lang="ko-KR" altLang="en-US" sz="2400" dirty="0">
+                <a:latin typeface="+mj-lt"/>
+              </a:rPr>
+              <a:t>매개변수 </a:t>
+            </a:r>
+            <a:r>
+              <a:rPr lang="en-US" altLang="ko-KR" sz="2400" dirty="0">
+                <a:latin typeface="+mj-lt"/>
+              </a:rPr>
+              <a:t>a, b</a:t>
+            </a:r>
+            <a:r>
+              <a:rPr lang="ko-KR" altLang="en-US" sz="2400" dirty="0">
+                <a:latin typeface="+mj-lt"/>
+              </a:rPr>
+              <a:t>의 </a:t>
+            </a:r>
+            <a:r>
+              <a:rPr lang="en-US" altLang="ko-KR" sz="2400" dirty="0">
+                <a:latin typeface="+mj-lt"/>
+              </a:rPr>
+              <a:t>type </a:t>
+            </a:r>
+            <a:r>
+              <a:rPr lang="ko-KR" altLang="en-US" sz="2400" dirty="0">
+                <a:latin typeface="+mj-lt"/>
+              </a:rPr>
+              <a:t>설정</a:t>
+            </a:r>
+            <a:endParaRPr lang="en-US" altLang="ko-KR" sz="2400" dirty="0">
+              <a:latin typeface="+mj-lt"/>
+            </a:endParaRPr>
+          </a:p>
+          <a:p>
+            <a:pPr marL="0" indent="0">
+              <a:buNone/>
+            </a:pPr>
+            <a:r>
+              <a:rPr lang="ko-KR" altLang="en-US" sz="2400" dirty="0">
+                <a:latin typeface="+mj-lt"/>
+              </a:rPr>
               <a:t>함수의 </a:t>
             </a:r>
             <a:r>
-              <a:rPr lang="en-US" altLang="ko-KR" sz="2400" dirty="0"/>
+              <a:rPr lang="en-US" altLang="ko-KR" sz="2400" dirty="0">
+                <a:latin typeface="+mj-lt"/>
+              </a:rPr>
               <a:t>return type </a:t>
             </a:r>
             <a:r>
-              <a:rPr lang="ko-KR" altLang="en-US" sz="2400" dirty="0"/>
+              <a:rPr lang="ko-KR" altLang="en-US" sz="2400" dirty="0">
+                <a:latin typeface="+mj-lt"/>
+              </a:rPr>
               <a:t>설정</a:t>
             </a:r>
           </a:p>
@@ -7552,15 +7939,15 @@
           <p:nvPr/>
         </p:nvPicPr>
         <p:blipFill>
-          <a:blip r:embed="rId2"/>
+          <a:blip r:embed="rId3"/>
           <a:stretch>
             <a:fillRect/>
           </a:stretch>
         </p:blipFill>
         <p:spPr>
           <a:xfrm>
-            <a:off x="742986" y="1690688"/>
-            <a:ext cx="4187023" cy="4351338"/>
+            <a:off x="304800" y="1316777"/>
+            <a:ext cx="4676656" cy="4860186"/>
           </a:xfrm>
           <a:prstGeom prst="rect">
             <a:avLst/>
@@ -10447,7 +10834,7 @@
           <a:p>
             <a:fld id="{0F78D9C4-20C1-4B15-A116-16DC77AD9A1E}" type="datetime1">
               <a:rPr lang="ko-KR" altLang="en-US" smtClean="0"/>
-              <a:t>2024-08-19</a:t>
+              <a:t>2024-08-20</a:t>
             </a:fld>
             <a:endParaRPr lang="ko-KR" altLang="en-US"/>
           </a:p>
@@ -10790,6 +11177,15 @@
                 <a:latin typeface="+mn-ea"/>
               </a:rPr>
               <a:t>강의 클릭</a:t>
+            </a:r>
+            <a:r>
+              <a:rPr lang="en-US" altLang="ko-KR" dirty="0">
+                <a:solidFill>
+                  <a:srgbClr val="212529"/>
+                </a:solidFill>
+                <a:latin typeface="+mn-ea"/>
+              </a:rPr>
+              <a:t/>
             </a:r>
             <a:br>
               <a:rPr lang="en-US" altLang="ko-KR" dirty="0">
